--- a/ProfitPilot_Pitch_Deck.pptx
+++ b/ProfitPilot_Pitch_Deck.pptx
@@ -3572,7 +3572,7 @@
               </a:defRPr>
             </a:pPr>
             <a:r>
-              <a:t>KiranaFlow AI Architecture | Powered by FastAPI, React 19, Pandas &amp; Google Gemini</a:t>
+              <a:t>ProfitPilot AI Architecture | Powered by FastAPI, React 19, Pandas &amp; Google Gemini</a:t>
             </a:r>
           </a:p>
         </p:txBody>
